--- a/public/videos/repositories/oshi-trip-alert/oshi-trip-alert-tech-preview.pptx
+++ b/public/videos/repositories/oshi-trip-alert/oshi-trip-alert-tech-preview.pptx
@@ -134,7 +134,7 @@
           <p:cNvPr id="2" name="タイトル 1">
             <a:extLst>
               <a:ext uri="{FF2B5EF4-FFF2-40B4-BE49-F238E27FC236}">
-                <a16:creationId xmlns:a16="http://schemas.microsoft.com/office/drawing/2014/main" id="{7B69D5BF-10B3-B4E7-9EC9-E9A6C4777127}"/>
+                <a16:creationId xmlns:a16="http://schemas.microsoft.com/office/drawing/2014/main" id="{399A3648-1EF5-8E08-B1BE-59600578B97F}"/>
               </a:ext>
             </a:extLst>
           </p:cNvPr>
@@ -171,7 +171,7 @@
           <p:cNvPr id="3" name="字幕 2">
             <a:extLst>
               <a:ext uri="{FF2B5EF4-FFF2-40B4-BE49-F238E27FC236}">
-                <a16:creationId xmlns:a16="http://schemas.microsoft.com/office/drawing/2014/main" id="{E87AA987-5268-BBF7-A4C6-376384E8DAAC}"/>
+                <a16:creationId xmlns:a16="http://schemas.microsoft.com/office/drawing/2014/main" id="{07542722-0E15-4A28-374E-9E78BFBE76FE}"/>
               </a:ext>
             </a:extLst>
           </p:cNvPr>
@@ -241,7 +241,7 @@
           <p:cNvPr id="4" name="日付プレースホルダー 3">
             <a:extLst>
               <a:ext uri="{FF2B5EF4-FFF2-40B4-BE49-F238E27FC236}">
-                <a16:creationId xmlns:a16="http://schemas.microsoft.com/office/drawing/2014/main" id="{044D7F06-5F4E-F297-23E6-312F89C16EFE}"/>
+                <a16:creationId xmlns:a16="http://schemas.microsoft.com/office/drawing/2014/main" id="{C2FAA3D2-2E3A-7CB9-2D41-5FFCC64F63E1}"/>
               </a:ext>
             </a:extLst>
           </p:cNvPr>
@@ -257,7 +257,7 @@
           <a:bodyPr/>
           <a:lstStyle/>
           <a:p>
-            <a:fld id="{F0308D24-4926-452D-9A00-10FD518294AA}" type="datetimeFigureOut">
+            <a:fld id="{8EBC7593-F991-4890-8707-0EA6C2F8869D}" type="datetimeFigureOut">
               <a:rPr kumimoji="1" lang="ja-JP" altLang="en-US" smtClean="0"/>
               <a:t>2026/7/30</a:t>
             </a:fld>
@@ -270,7 +270,7 @@
           <p:cNvPr id="5" name="フッター プレースホルダー 4">
             <a:extLst>
               <a:ext uri="{FF2B5EF4-FFF2-40B4-BE49-F238E27FC236}">
-                <a16:creationId xmlns:a16="http://schemas.microsoft.com/office/drawing/2014/main" id="{A44EED85-2697-D1FF-3EA9-6DFA6C2D226A}"/>
+                <a16:creationId xmlns:a16="http://schemas.microsoft.com/office/drawing/2014/main" id="{02ED2233-A968-3526-0E19-94FC6C62C0FD}"/>
               </a:ext>
             </a:extLst>
           </p:cNvPr>
@@ -295,7 +295,7 @@
           <p:cNvPr id="6" name="スライド番号プレースホルダー 5">
             <a:extLst>
               <a:ext uri="{FF2B5EF4-FFF2-40B4-BE49-F238E27FC236}">
-                <a16:creationId xmlns:a16="http://schemas.microsoft.com/office/drawing/2014/main" id="{E7D7E0F3-6645-D8BE-F09B-B65886B332E9}"/>
+                <a16:creationId xmlns:a16="http://schemas.microsoft.com/office/drawing/2014/main" id="{1F85498A-FF62-FED2-7F11-ECE9A7BC339A}"/>
               </a:ext>
             </a:extLst>
           </p:cNvPr>
@@ -311,7 +311,7 @@
           <a:bodyPr/>
           <a:lstStyle/>
           <a:p>
-            <a:fld id="{2F437BE5-DDFB-4005-B8E6-F4EDF8F6ADAF}" type="slidenum">
+            <a:fld id="{983B056A-CDE9-4578-9916-10D9078A5DFB}" type="slidenum">
               <a:rPr kumimoji="1" lang="ja-JP" altLang="en-US" smtClean="0"/>
               <a:t>‹#›</a:t>
             </a:fld>
@@ -322,7 +322,7 @@
     </p:spTree>
     <p:extLst>
       <p:ext uri="{BB962C8B-B14F-4D97-AF65-F5344CB8AC3E}">
-        <p14:creationId xmlns:p14="http://schemas.microsoft.com/office/powerpoint/2010/main" val="634490397"/>
+        <p14:creationId xmlns:p14="http://schemas.microsoft.com/office/powerpoint/2010/main" val="2278602904"/>
       </p:ext>
     </p:extLst>
   </p:cSld>
@@ -354,7 +354,7 @@
           <p:cNvPr id="2" name="タイトル 1">
             <a:extLst>
               <a:ext uri="{FF2B5EF4-FFF2-40B4-BE49-F238E27FC236}">
-                <a16:creationId xmlns:a16="http://schemas.microsoft.com/office/drawing/2014/main" id="{735AB42E-D85F-C9CD-205D-97FDA2C61199}"/>
+                <a16:creationId xmlns:a16="http://schemas.microsoft.com/office/drawing/2014/main" id="{491F664D-AA88-1E3A-5446-58CF648EA0AC}"/>
               </a:ext>
             </a:extLst>
           </p:cNvPr>
@@ -382,7 +382,7 @@
           <p:cNvPr id="3" name="縦書きテキスト プレースホルダー 2">
             <a:extLst>
               <a:ext uri="{FF2B5EF4-FFF2-40B4-BE49-F238E27FC236}">
-                <a16:creationId xmlns:a16="http://schemas.microsoft.com/office/drawing/2014/main" id="{AFEF5A38-5DB8-0F51-321C-E2A04796AF22}"/>
+                <a16:creationId xmlns:a16="http://schemas.microsoft.com/office/drawing/2014/main" id="{FDD9C568-8635-5115-C066-A582802F626B}"/>
               </a:ext>
             </a:extLst>
           </p:cNvPr>
@@ -471,7 +471,7 @@
           <p:cNvPr id="4" name="日付プレースホルダー 3">
             <a:extLst>
               <a:ext uri="{FF2B5EF4-FFF2-40B4-BE49-F238E27FC236}">
-                <a16:creationId xmlns:a16="http://schemas.microsoft.com/office/drawing/2014/main" id="{EB707A24-FEF5-406B-B78D-C5D77445B582}"/>
+                <a16:creationId xmlns:a16="http://schemas.microsoft.com/office/drawing/2014/main" id="{E36ABD0C-8C95-A76C-4AE9-819583F896C2}"/>
               </a:ext>
             </a:extLst>
           </p:cNvPr>
@@ -487,7 +487,7 @@
           <a:bodyPr/>
           <a:lstStyle/>
           <a:p>
-            <a:fld id="{F0308D24-4926-452D-9A00-10FD518294AA}" type="datetimeFigureOut">
+            <a:fld id="{8EBC7593-F991-4890-8707-0EA6C2F8869D}" type="datetimeFigureOut">
               <a:rPr kumimoji="1" lang="ja-JP" altLang="en-US" smtClean="0"/>
               <a:t>2026/7/30</a:t>
             </a:fld>
@@ -500,7 +500,7 @@
           <p:cNvPr id="5" name="フッター プレースホルダー 4">
             <a:extLst>
               <a:ext uri="{FF2B5EF4-FFF2-40B4-BE49-F238E27FC236}">
-                <a16:creationId xmlns:a16="http://schemas.microsoft.com/office/drawing/2014/main" id="{AB94ADE2-3C32-9B79-6DB7-239EE1D20E35}"/>
+                <a16:creationId xmlns:a16="http://schemas.microsoft.com/office/drawing/2014/main" id="{8C077050-BC9D-B61E-6EE2-4C89FB511314}"/>
               </a:ext>
             </a:extLst>
           </p:cNvPr>
@@ -525,7 +525,7 @@
           <p:cNvPr id="6" name="スライド番号プレースホルダー 5">
             <a:extLst>
               <a:ext uri="{FF2B5EF4-FFF2-40B4-BE49-F238E27FC236}">
-                <a16:creationId xmlns:a16="http://schemas.microsoft.com/office/drawing/2014/main" id="{A352245C-EF1E-E5A5-9CFC-23752F6098DD}"/>
+                <a16:creationId xmlns:a16="http://schemas.microsoft.com/office/drawing/2014/main" id="{6D8AFCE0-5A3A-1F7F-6137-1160CA57917E}"/>
               </a:ext>
             </a:extLst>
           </p:cNvPr>
@@ -541,7 +541,7 @@
           <a:bodyPr/>
           <a:lstStyle/>
           <a:p>
-            <a:fld id="{2F437BE5-DDFB-4005-B8E6-F4EDF8F6ADAF}" type="slidenum">
+            <a:fld id="{983B056A-CDE9-4578-9916-10D9078A5DFB}" type="slidenum">
               <a:rPr kumimoji="1" lang="ja-JP" altLang="en-US" smtClean="0"/>
               <a:t>‹#›</a:t>
             </a:fld>
@@ -552,7 +552,7 @@
     </p:spTree>
     <p:extLst>
       <p:ext uri="{BB962C8B-B14F-4D97-AF65-F5344CB8AC3E}">
-        <p14:creationId xmlns:p14="http://schemas.microsoft.com/office/powerpoint/2010/main" val="3081667493"/>
+        <p14:creationId xmlns:p14="http://schemas.microsoft.com/office/powerpoint/2010/main" val="2823053411"/>
       </p:ext>
     </p:extLst>
   </p:cSld>
@@ -584,7 +584,7 @@
           <p:cNvPr id="2" name="縦書きタイトル 1">
             <a:extLst>
               <a:ext uri="{FF2B5EF4-FFF2-40B4-BE49-F238E27FC236}">
-                <a16:creationId xmlns:a16="http://schemas.microsoft.com/office/drawing/2014/main" id="{FCC5F542-60A3-B8D7-0AAD-E56B7D125B85}"/>
+                <a16:creationId xmlns:a16="http://schemas.microsoft.com/office/drawing/2014/main" id="{0609FA96-E7F5-8F7D-3D40-F2FBC42C57C5}"/>
               </a:ext>
             </a:extLst>
           </p:cNvPr>
@@ -617,7 +617,7 @@
           <p:cNvPr id="3" name="縦書きテキスト プレースホルダー 2">
             <a:extLst>
               <a:ext uri="{FF2B5EF4-FFF2-40B4-BE49-F238E27FC236}">
-                <a16:creationId xmlns:a16="http://schemas.microsoft.com/office/drawing/2014/main" id="{CB154FB8-EE70-A35C-35C8-41C6EC0EBE8E}"/>
+                <a16:creationId xmlns:a16="http://schemas.microsoft.com/office/drawing/2014/main" id="{CC2AABEE-4056-A4A9-2EBE-B9D0E07A59D8}"/>
               </a:ext>
             </a:extLst>
           </p:cNvPr>
@@ -711,7 +711,7 @@
           <p:cNvPr id="4" name="日付プレースホルダー 3">
             <a:extLst>
               <a:ext uri="{FF2B5EF4-FFF2-40B4-BE49-F238E27FC236}">
-                <a16:creationId xmlns:a16="http://schemas.microsoft.com/office/drawing/2014/main" id="{2CEF6D33-BBD7-88D1-6520-AD98265F0B62}"/>
+                <a16:creationId xmlns:a16="http://schemas.microsoft.com/office/drawing/2014/main" id="{04E4DFDC-1CD4-4AFF-A497-C11EBE6930AC}"/>
               </a:ext>
             </a:extLst>
           </p:cNvPr>
@@ -727,7 +727,7 @@
           <a:bodyPr/>
           <a:lstStyle/>
           <a:p>
-            <a:fld id="{F0308D24-4926-452D-9A00-10FD518294AA}" type="datetimeFigureOut">
+            <a:fld id="{8EBC7593-F991-4890-8707-0EA6C2F8869D}" type="datetimeFigureOut">
               <a:rPr kumimoji="1" lang="ja-JP" altLang="en-US" smtClean="0"/>
               <a:t>2026/7/30</a:t>
             </a:fld>
@@ -740,7 +740,7 @@
           <p:cNvPr id="5" name="フッター プレースホルダー 4">
             <a:extLst>
               <a:ext uri="{FF2B5EF4-FFF2-40B4-BE49-F238E27FC236}">
-                <a16:creationId xmlns:a16="http://schemas.microsoft.com/office/drawing/2014/main" id="{1A29D1B8-E2AF-5360-E734-DFFB9264D22F}"/>
+                <a16:creationId xmlns:a16="http://schemas.microsoft.com/office/drawing/2014/main" id="{CD3AE8C8-AC1D-E588-A39D-B513A20728C0}"/>
               </a:ext>
             </a:extLst>
           </p:cNvPr>
@@ -765,7 +765,7 @@
           <p:cNvPr id="6" name="スライド番号プレースホルダー 5">
             <a:extLst>
               <a:ext uri="{FF2B5EF4-FFF2-40B4-BE49-F238E27FC236}">
-                <a16:creationId xmlns:a16="http://schemas.microsoft.com/office/drawing/2014/main" id="{DBC559AA-79D8-FF37-ABFA-716CD77CE500}"/>
+                <a16:creationId xmlns:a16="http://schemas.microsoft.com/office/drawing/2014/main" id="{C13C99CD-43EC-6302-A8C2-297C427DC6BC}"/>
               </a:ext>
             </a:extLst>
           </p:cNvPr>
@@ -781,7 +781,7 @@
           <a:bodyPr/>
           <a:lstStyle/>
           <a:p>
-            <a:fld id="{2F437BE5-DDFB-4005-B8E6-F4EDF8F6ADAF}" type="slidenum">
+            <a:fld id="{983B056A-CDE9-4578-9916-10D9078A5DFB}" type="slidenum">
               <a:rPr kumimoji="1" lang="ja-JP" altLang="en-US" smtClean="0"/>
               <a:t>‹#›</a:t>
             </a:fld>
@@ -792,7 +792,7 @@
     </p:spTree>
     <p:extLst>
       <p:ext uri="{BB962C8B-B14F-4D97-AF65-F5344CB8AC3E}">
-        <p14:creationId xmlns:p14="http://schemas.microsoft.com/office/powerpoint/2010/main" val="1140380879"/>
+        <p14:creationId xmlns:p14="http://schemas.microsoft.com/office/powerpoint/2010/main" val="3616194251"/>
       </p:ext>
     </p:extLst>
   </p:cSld>
@@ -824,7 +824,7 @@
           <p:cNvPr id="2" name="タイトル 1">
             <a:extLst>
               <a:ext uri="{FF2B5EF4-FFF2-40B4-BE49-F238E27FC236}">
-                <a16:creationId xmlns:a16="http://schemas.microsoft.com/office/drawing/2014/main" id="{E6FB27ED-689B-8B0B-7303-DDDDD5E93EC2}"/>
+                <a16:creationId xmlns:a16="http://schemas.microsoft.com/office/drawing/2014/main" id="{7B7F41F0-E2DA-AEFB-1E71-270CAEDF4B84}"/>
               </a:ext>
             </a:extLst>
           </p:cNvPr>
@@ -852,7 +852,7 @@
           <p:cNvPr id="3" name="コンテンツ プレースホルダー 2">
             <a:extLst>
               <a:ext uri="{FF2B5EF4-FFF2-40B4-BE49-F238E27FC236}">
-                <a16:creationId xmlns:a16="http://schemas.microsoft.com/office/drawing/2014/main" id="{8C4C0D4E-B644-7152-0775-A5D8BF750724}"/>
+                <a16:creationId xmlns:a16="http://schemas.microsoft.com/office/drawing/2014/main" id="{D0B04F0D-EE51-30FB-3EA7-F7D0D8D70F21}"/>
               </a:ext>
             </a:extLst>
           </p:cNvPr>
@@ -941,7 +941,7 @@
           <p:cNvPr id="4" name="日付プレースホルダー 3">
             <a:extLst>
               <a:ext uri="{FF2B5EF4-FFF2-40B4-BE49-F238E27FC236}">
-                <a16:creationId xmlns:a16="http://schemas.microsoft.com/office/drawing/2014/main" id="{224AEA65-A14C-5CE0-B0B2-4304DBE39F1F}"/>
+                <a16:creationId xmlns:a16="http://schemas.microsoft.com/office/drawing/2014/main" id="{6ECE7B07-035B-A6EA-1254-718479FB2BC5}"/>
               </a:ext>
             </a:extLst>
           </p:cNvPr>
@@ -957,7 +957,7 @@
           <a:bodyPr/>
           <a:lstStyle/>
           <a:p>
-            <a:fld id="{F0308D24-4926-452D-9A00-10FD518294AA}" type="datetimeFigureOut">
+            <a:fld id="{8EBC7593-F991-4890-8707-0EA6C2F8869D}" type="datetimeFigureOut">
               <a:rPr kumimoji="1" lang="ja-JP" altLang="en-US" smtClean="0"/>
               <a:t>2026/7/30</a:t>
             </a:fld>
@@ -970,7 +970,7 @@
           <p:cNvPr id="5" name="フッター プレースホルダー 4">
             <a:extLst>
               <a:ext uri="{FF2B5EF4-FFF2-40B4-BE49-F238E27FC236}">
-                <a16:creationId xmlns:a16="http://schemas.microsoft.com/office/drawing/2014/main" id="{81F7E500-53AB-F1E8-ECBB-C57F02DC4822}"/>
+                <a16:creationId xmlns:a16="http://schemas.microsoft.com/office/drawing/2014/main" id="{233F1145-C8A3-42FC-271D-84E33726A29E}"/>
               </a:ext>
             </a:extLst>
           </p:cNvPr>
@@ -995,7 +995,7 @@
           <p:cNvPr id="6" name="スライド番号プレースホルダー 5">
             <a:extLst>
               <a:ext uri="{FF2B5EF4-FFF2-40B4-BE49-F238E27FC236}">
-                <a16:creationId xmlns:a16="http://schemas.microsoft.com/office/drawing/2014/main" id="{CA2E5430-38F7-60F1-5872-6F284D33BF1C}"/>
+                <a16:creationId xmlns:a16="http://schemas.microsoft.com/office/drawing/2014/main" id="{1E8FBC38-F35F-CDAF-12D2-9FE6FEA282ED}"/>
               </a:ext>
             </a:extLst>
           </p:cNvPr>
@@ -1011,7 +1011,7 @@
           <a:bodyPr/>
           <a:lstStyle/>
           <a:p>
-            <a:fld id="{2F437BE5-DDFB-4005-B8E6-F4EDF8F6ADAF}" type="slidenum">
+            <a:fld id="{983B056A-CDE9-4578-9916-10D9078A5DFB}" type="slidenum">
               <a:rPr kumimoji="1" lang="ja-JP" altLang="en-US" smtClean="0"/>
               <a:t>‹#›</a:t>
             </a:fld>
@@ -1022,7 +1022,7 @@
     </p:spTree>
     <p:extLst>
       <p:ext uri="{BB962C8B-B14F-4D97-AF65-F5344CB8AC3E}">
-        <p14:creationId xmlns:p14="http://schemas.microsoft.com/office/powerpoint/2010/main" val="2337119947"/>
+        <p14:creationId xmlns:p14="http://schemas.microsoft.com/office/powerpoint/2010/main" val="2666079190"/>
       </p:ext>
     </p:extLst>
   </p:cSld>
@@ -1054,7 +1054,7 @@
           <p:cNvPr id="2" name="タイトル 1">
             <a:extLst>
               <a:ext uri="{FF2B5EF4-FFF2-40B4-BE49-F238E27FC236}">
-                <a16:creationId xmlns:a16="http://schemas.microsoft.com/office/drawing/2014/main" id="{5E4CD7E9-E16C-C082-B58E-29D7CB64315D}"/>
+                <a16:creationId xmlns:a16="http://schemas.microsoft.com/office/drawing/2014/main" id="{5A324373-F863-E1D4-2C0E-83885736D6FE}"/>
               </a:ext>
             </a:extLst>
           </p:cNvPr>
@@ -1091,7 +1091,7 @@
           <p:cNvPr id="3" name="テキスト プレースホルダー 2">
             <a:extLst>
               <a:ext uri="{FF2B5EF4-FFF2-40B4-BE49-F238E27FC236}">
-                <a16:creationId xmlns:a16="http://schemas.microsoft.com/office/drawing/2014/main" id="{BFA87251-1C97-ABE9-9DC7-4CA11277DE03}"/>
+                <a16:creationId xmlns:a16="http://schemas.microsoft.com/office/drawing/2014/main" id="{9C30DF28-F52B-9EDA-01EF-CC5B67534260}"/>
               </a:ext>
             </a:extLst>
           </p:cNvPr>
@@ -1216,7 +1216,7 @@
           <p:cNvPr id="4" name="日付プレースホルダー 3">
             <a:extLst>
               <a:ext uri="{FF2B5EF4-FFF2-40B4-BE49-F238E27FC236}">
-                <a16:creationId xmlns:a16="http://schemas.microsoft.com/office/drawing/2014/main" id="{E8AC34F6-D653-3BE8-DE36-9642C43CD1E0}"/>
+                <a16:creationId xmlns:a16="http://schemas.microsoft.com/office/drawing/2014/main" id="{F4DB7A8B-2B47-D5F3-FA6E-F54760816B6A}"/>
               </a:ext>
             </a:extLst>
           </p:cNvPr>
@@ -1232,7 +1232,7 @@
           <a:bodyPr/>
           <a:lstStyle/>
           <a:p>
-            <a:fld id="{F0308D24-4926-452D-9A00-10FD518294AA}" type="datetimeFigureOut">
+            <a:fld id="{8EBC7593-F991-4890-8707-0EA6C2F8869D}" type="datetimeFigureOut">
               <a:rPr kumimoji="1" lang="ja-JP" altLang="en-US" smtClean="0"/>
               <a:t>2026/7/30</a:t>
             </a:fld>
@@ -1245,7 +1245,7 @@
           <p:cNvPr id="5" name="フッター プレースホルダー 4">
             <a:extLst>
               <a:ext uri="{FF2B5EF4-FFF2-40B4-BE49-F238E27FC236}">
-                <a16:creationId xmlns:a16="http://schemas.microsoft.com/office/drawing/2014/main" id="{1ECB77E6-F07C-0DB9-412D-E86515846F9D}"/>
+                <a16:creationId xmlns:a16="http://schemas.microsoft.com/office/drawing/2014/main" id="{70D06CDB-F57F-425E-6ADA-9AB106C34796}"/>
               </a:ext>
             </a:extLst>
           </p:cNvPr>
@@ -1270,7 +1270,7 @@
           <p:cNvPr id="6" name="スライド番号プレースホルダー 5">
             <a:extLst>
               <a:ext uri="{FF2B5EF4-FFF2-40B4-BE49-F238E27FC236}">
-                <a16:creationId xmlns:a16="http://schemas.microsoft.com/office/drawing/2014/main" id="{3CFA1A7D-7D17-2131-B5DF-613051925EEF}"/>
+                <a16:creationId xmlns:a16="http://schemas.microsoft.com/office/drawing/2014/main" id="{BF9D9E4F-31BC-5B27-4B7E-AF37DB9BD81F}"/>
               </a:ext>
             </a:extLst>
           </p:cNvPr>
@@ -1286,7 +1286,7 @@
           <a:bodyPr/>
           <a:lstStyle/>
           <a:p>
-            <a:fld id="{2F437BE5-DDFB-4005-B8E6-F4EDF8F6ADAF}" type="slidenum">
+            <a:fld id="{983B056A-CDE9-4578-9916-10D9078A5DFB}" type="slidenum">
               <a:rPr kumimoji="1" lang="ja-JP" altLang="en-US" smtClean="0"/>
               <a:t>‹#›</a:t>
             </a:fld>
@@ -1297,7 +1297,7 @@
     </p:spTree>
     <p:extLst>
       <p:ext uri="{BB962C8B-B14F-4D97-AF65-F5344CB8AC3E}">
-        <p14:creationId xmlns:p14="http://schemas.microsoft.com/office/powerpoint/2010/main" val="3837335039"/>
+        <p14:creationId xmlns:p14="http://schemas.microsoft.com/office/powerpoint/2010/main" val="3029946290"/>
       </p:ext>
     </p:extLst>
   </p:cSld>
@@ -1329,7 +1329,7 @@
           <p:cNvPr id="2" name="タイトル 1">
             <a:extLst>
               <a:ext uri="{FF2B5EF4-FFF2-40B4-BE49-F238E27FC236}">
-                <a16:creationId xmlns:a16="http://schemas.microsoft.com/office/drawing/2014/main" id="{BFF96AB2-A6A4-FDC6-DCB1-87E248B1F4F1}"/>
+                <a16:creationId xmlns:a16="http://schemas.microsoft.com/office/drawing/2014/main" id="{B87DDFB7-C1FF-CA5B-2397-42778C078D37}"/>
               </a:ext>
             </a:extLst>
           </p:cNvPr>
@@ -1357,7 +1357,7 @@
           <p:cNvPr id="3" name="コンテンツ プレースホルダー 2">
             <a:extLst>
               <a:ext uri="{FF2B5EF4-FFF2-40B4-BE49-F238E27FC236}">
-                <a16:creationId xmlns:a16="http://schemas.microsoft.com/office/drawing/2014/main" id="{151DD0C1-F2F2-6B65-E219-A4B6632B07CF}"/>
+                <a16:creationId xmlns:a16="http://schemas.microsoft.com/office/drawing/2014/main" id="{086B81CB-65CE-5C71-279F-25289F0A2AD6}"/>
               </a:ext>
             </a:extLst>
           </p:cNvPr>
@@ -1451,7 +1451,7 @@
           <p:cNvPr id="4" name="コンテンツ プレースホルダー 3">
             <a:extLst>
               <a:ext uri="{FF2B5EF4-FFF2-40B4-BE49-F238E27FC236}">
-                <a16:creationId xmlns:a16="http://schemas.microsoft.com/office/drawing/2014/main" id="{F919163C-4BFF-CEAD-19C3-08C9D457115E}"/>
+                <a16:creationId xmlns:a16="http://schemas.microsoft.com/office/drawing/2014/main" id="{AD00A785-0BAF-F1B8-0788-A17B4825DA36}"/>
               </a:ext>
             </a:extLst>
           </p:cNvPr>
@@ -1545,7 +1545,7 @@
           <p:cNvPr id="5" name="日付プレースホルダー 4">
             <a:extLst>
               <a:ext uri="{FF2B5EF4-FFF2-40B4-BE49-F238E27FC236}">
-                <a16:creationId xmlns:a16="http://schemas.microsoft.com/office/drawing/2014/main" id="{4082B984-F060-57CC-183D-35D30FC642BF}"/>
+                <a16:creationId xmlns:a16="http://schemas.microsoft.com/office/drawing/2014/main" id="{4F7CA8AC-98A2-1BC7-E543-64FC9C127E2B}"/>
               </a:ext>
             </a:extLst>
           </p:cNvPr>
@@ -1561,7 +1561,7 @@
           <a:bodyPr/>
           <a:lstStyle/>
           <a:p>
-            <a:fld id="{F0308D24-4926-452D-9A00-10FD518294AA}" type="datetimeFigureOut">
+            <a:fld id="{8EBC7593-F991-4890-8707-0EA6C2F8869D}" type="datetimeFigureOut">
               <a:rPr kumimoji="1" lang="ja-JP" altLang="en-US" smtClean="0"/>
               <a:t>2026/7/30</a:t>
             </a:fld>
@@ -1574,7 +1574,7 @@
           <p:cNvPr id="6" name="フッター プレースホルダー 5">
             <a:extLst>
               <a:ext uri="{FF2B5EF4-FFF2-40B4-BE49-F238E27FC236}">
-                <a16:creationId xmlns:a16="http://schemas.microsoft.com/office/drawing/2014/main" id="{CD9A5553-7EBF-2C9F-8B3E-DE58759C06AA}"/>
+                <a16:creationId xmlns:a16="http://schemas.microsoft.com/office/drawing/2014/main" id="{645B4D0F-7423-B21C-9937-E23DBD9F0FC2}"/>
               </a:ext>
             </a:extLst>
           </p:cNvPr>
@@ -1599,7 +1599,7 @@
           <p:cNvPr id="7" name="スライド番号プレースホルダー 6">
             <a:extLst>
               <a:ext uri="{FF2B5EF4-FFF2-40B4-BE49-F238E27FC236}">
-                <a16:creationId xmlns:a16="http://schemas.microsoft.com/office/drawing/2014/main" id="{E146C4E3-00E4-14FE-72CC-16EB244FCF67}"/>
+                <a16:creationId xmlns:a16="http://schemas.microsoft.com/office/drawing/2014/main" id="{FCEFDEA3-B299-0B54-6ABA-3AB7C0567EBB}"/>
               </a:ext>
             </a:extLst>
           </p:cNvPr>
@@ -1615,7 +1615,7 @@
           <a:bodyPr/>
           <a:lstStyle/>
           <a:p>
-            <a:fld id="{2F437BE5-DDFB-4005-B8E6-F4EDF8F6ADAF}" type="slidenum">
+            <a:fld id="{983B056A-CDE9-4578-9916-10D9078A5DFB}" type="slidenum">
               <a:rPr kumimoji="1" lang="ja-JP" altLang="en-US" smtClean="0"/>
               <a:t>‹#›</a:t>
             </a:fld>
@@ -1626,7 +1626,7 @@
     </p:spTree>
     <p:extLst>
       <p:ext uri="{BB962C8B-B14F-4D97-AF65-F5344CB8AC3E}">
-        <p14:creationId xmlns:p14="http://schemas.microsoft.com/office/powerpoint/2010/main" val="2499984896"/>
+        <p14:creationId xmlns:p14="http://schemas.microsoft.com/office/powerpoint/2010/main" val="3005962013"/>
       </p:ext>
     </p:extLst>
   </p:cSld>
@@ -1658,7 +1658,7 @@
           <p:cNvPr id="2" name="タイトル 1">
             <a:extLst>
               <a:ext uri="{FF2B5EF4-FFF2-40B4-BE49-F238E27FC236}">
-                <a16:creationId xmlns:a16="http://schemas.microsoft.com/office/drawing/2014/main" id="{BF8C04CD-3D58-67BA-E501-F2830DAA507B}"/>
+                <a16:creationId xmlns:a16="http://schemas.microsoft.com/office/drawing/2014/main" id="{BF9E2E39-83C8-9955-955A-C89F24EE058B}"/>
               </a:ext>
             </a:extLst>
           </p:cNvPr>
@@ -1691,7 +1691,7 @@
           <p:cNvPr id="3" name="テキスト プレースホルダー 2">
             <a:extLst>
               <a:ext uri="{FF2B5EF4-FFF2-40B4-BE49-F238E27FC236}">
-                <a16:creationId xmlns:a16="http://schemas.microsoft.com/office/drawing/2014/main" id="{341697CD-0C18-870B-7FF2-6AEF4B72AD11}"/>
+                <a16:creationId xmlns:a16="http://schemas.microsoft.com/office/drawing/2014/main" id="{416D1717-33D0-5CC1-EC4E-589E171EEF70}"/>
               </a:ext>
             </a:extLst>
           </p:cNvPr>
@@ -1762,7 +1762,7 @@
           <p:cNvPr id="4" name="コンテンツ プレースホルダー 3">
             <a:extLst>
               <a:ext uri="{FF2B5EF4-FFF2-40B4-BE49-F238E27FC236}">
-                <a16:creationId xmlns:a16="http://schemas.microsoft.com/office/drawing/2014/main" id="{5BC518E2-4221-DB79-7BB0-FD1070D4ECA9}"/>
+                <a16:creationId xmlns:a16="http://schemas.microsoft.com/office/drawing/2014/main" id="{454E405E-19FC-8A7A-EB26-6C202B59BEDD}"/>
               </a:ext>
             </a:extLst>
           </p:cNvPr>
@@ -1856,7 +1856,7 @@
           <p:cNvPr id="5" name="テキスト プレースホルダー 4">
             <a:extLst>
               <a:ext uri="{FF2B5EF4-FFF2-40B4-BE49-F238E27FC236}">
-                <a16:creationId xmlns:a16="http://schemas.microsoft.com/office/drawing/2014/main" id="{CFA1B8AD-3742-FB7C-5425-DB0CC1504637}"/>
+                <a16:creationId xmlns:a16="http://schemas.microsoft.com/office/drawing/2014/main" id="{AB1A3BE3-0FFA-4836-2A6F-D84A25867E48}"/>
               </a:ext>
             </a:extLst>
           </p:cNvPr>
@@ -1927,7 +1927,7 @@
           <p:cNvPr id="6" name="コンテンツ プレースホルダー 5">
             <a:extLst>
               <a:ext uri="{FF2B5EF4-FFF2-40B4-BE49-F238E27FC236}">
-                <a16:creationId xmlns:a16="http://schemas.microsoft.com/office/drawing/2014/main" id="{6999282E-6016-ACDD-ADEF-F33C8614ACB8}"/>
+                <a16:creationId xmlns:a16="http://schemas.microsoft.com/office/drawing/2014/main" id="{58962F67-0304-B50F-D0C1-DFF6279BD974}"/>
               </a:ext>
             </a:extLst>
           </p:cNvPr>
@@ -2021,7 +2021,7 @@
           <p:cNvPr id="7" name="日付プレースホルダー 6">
             <a:extLst>
               <a:ext uri="{FF2B5EF4-FFF2-40B4-BE49-F238E27FC236}">
-                <a16:creationId xmlns:a16="http://schemas.microsoft.com/office/drawing/2014/main" id="{DD04E645-6D59-6829-72D8-1EFF0639E34A}"/>
+                <a16:creationId xmlns:a16="http://schemas.microsoft.com/office/drawing/2014/main" id="{416BACB7-46B9-0EBC-0688-AAF2A66B4342}"/>
               </a:ext>
             </a:extLst>
           </p:cNvPr>
@@ -2037,7 +2037,7 @@
           <a:bodyPr/>
           <a:lstStyle/>
           <a:p>
-            <a:fld id="{F0308D24-4926-452D-9A00-10FD518294AA}" type="datetimeFigureOut">
+            <a:fld id="{8EBC7593-F991-4890-8707-0EA6C2F8869D}" type="datetimeFigureOut">
               <a:rPr kumimoji="1" lang="ja-JP" altLang="en-US" smtClean="0"/>
               <a:t>2026/7/30</a:t>
             </a:fld>
@@ -2050,7 +2050,7 @@
           <p:cNvPr id="8" name="フッター プレースホルダー 7">
             <a:extLst>
               <a:ext uri="{FF2B5EF4-FFF2-40B4-BE49-F238E27FC236}">
-                <a16:creationId xmlns:a16="http://schemas.microsoft.com/office/drawing/2014/main" id="{D087995E-3379-1DD8-64D5-B1775A759678}"/>
+                <a16:creationId xmlns:a16="http://schemas.microsoft.com/office/drawing/2014/main" id="{D315D21E-6EB1-6D3F-4C0C-A3EE3FCEB223}"/>
               </a:ext>
             </a:extLst>
           </p:cNvPr>
@@ -2075,7 +2075,7 @@
           <p:cNvPr id="9" name="スライド番号プレースホルダー 8">
             <a:extLst>
               <a:ext uri="{FF2B5EF4-FFF2-40B4-BE49-F238E27FC236}">
-                <a16:creationId xmlns:a16="http://schemas.microsoft.com/office/drawing/2014/main" id="{C936DEB0-B9A8-5F00-835A-C01AEAEAF55C}"/>
+                <a16:creationId xmlns:a16="http://schemas.microsoft.com/office/drawing/2014/main" id="{58389837-532C-96D6-5CEE-A4ECB4A34CD9}"/>
               </a:ext>
             </a:extLst>
           </p:cNvPr>
@@ -2091,7 +2091,7 @@
           <a:bodyPr/>
           <a:lstStyle/>
           <a:p>
-            <a:fld id="{2F437BE5-DDFB-4005-B8E6-F4EDF8F6ADAF}" type="slidenum">
+            <a:fld id="{983B056A-CDE9-4578-9916-10D9078A5DFB}" type="slidenum">
               <a:rPr kumimoji="1" lang="ja-JP" altLang="en-US" smtClean="0"/>
               <a:t>‹#›</a:t>
             </a:fld>
@@ -2102,7 +2102,7 @@
     </p:spTree>
     <p:extLst>
       <p:ext uri="{BB962C8B-B14F-4D97-AF65-F5344CB8AC3E}">
-        <p14:creationId xmlns:p14="http://schemas.microsoft.com/office/powerpoint/2010/main" val="1389265530"/>
+        <p14:creationId xmlns:p14="http://schemas.microsoft.com/office/powerpoint/2010/main" val="1667436511"/>
       </p:ext>
     </p:extLst>
   </p:cSld>
@@ -2134,7 +2134,7 @@
           <p:cNvPr id="2" name="タイトル 1">
             <a:extLst>
               <a:ext uri="{FF2B5EF4-FFF2-40B4-BE49-F238E27FC236}">
-                <a16:creationId xmlns:a16="http://schemas.microsoft.com/office/drawing/2014/main" id="{B60A9419-8BE4-4C37-4811-F826A808FC79}"/>
+                <a16:creationId xmlns:a16="http://schemas.microsoft.com/office/drawing/2014/main" id="{6A5AE8AD-FF58-F9A6-EF25-B9A17EF72A95}"/>
               </a:ext>
             </a:extLst>
           </p:cNvPr>
@@ -2162,7 +2162,7 @@
           <p:cNvPr id="3" name="日付プレースホルダー 2">
             <a:extLst>
               <a:ext uri="{FF2B5EF4-FFF2-40B4-BE49-F238E27FC236}">
-                <a16:creationId xmlns:a16="http://schemas.microsoft.com/office/drawing/2014/main" id="{AD6F994A-F3DB-7A2C-398E-0FD9B2341430}"/>
+                <a16:creationId xmlns:a16="http://schemas.microsoft.com/office/drawing/2014/main" id="{ED534D6A-8EDF-0536-2160-065BDB72CCD2}"/>
               </a:ext>
             </a:extLst>
           </p:cNvPr>
@@ -2178,7 +2178,7 @@
           <a:bodyPr/>
           <a:lstStyle/>
           <a:p>
-            <a:fld id="{F0308D24-4926-452D-9A00-10FD518294AA}" type="datetimeFigureOut">
+            <a:fld id="{8EBC7593-F991-4890-8707-0EA6C2F8869D}" type="datetimeFigureOut">
               <a:rPr kumimoji="1" lang="ja-JP" altLang="en-US" smtClean="0"/>
               <a:t>2026/7/30</a:t>
             </a:fld>
@@ -2191,7 +2191,7 @@
           <p:cNvPr id="4" name="フッター プレースホルダー 3">
             <a:extLst>
               <a:ext uri="{FF2B5EF4-FFF2-40B4-BE49-F238E27FC236}">
-                <a16:creationId xmlns:a16="http://schemas.microsoft.com/office/drawing/2014/main" id="{6537C713-63B4-C0D4-2B40-05993A106FDF}"/>
+                <a16:creationId xmlns:a16="http://schemas.microsoft.com/office/drawing/2014/main" id="{ECC13B37-B26A-41DF-ADA7-18FA9554E097}"/>
               </a:ext>
             </a:extLst>
           </p:cNvPr>
@@ -2216,7 +2216,7 @@
           <p:cNvPr id="5" name="スライド番号プレースホルダー 4">
             <a:extLst>
               <a:ext uri="{FF2B5EF4-FFF2-40B4-BE49-F238E27FC236}">
-                <a16:creationId xmlns:a16="http://schemas.microsoft.com/office/drawing/2014/main" id="{1C4D5D99-30E5-9C5D-19D2-64B18BE5F60E}"/>
+                <a16:creationId xmlns:a16="http://schemas.microsoft.com/office/drawing/2014/main" id="{4E744B0D-A644-5F0B-3FFF-CFAC34D222A0}"/>
               </a:ext>
             </a:extLst>
           </p:cNvPr>
@@ -2232,7 +2232,7 @@
           <a:bodyPr/>
           <a:lstStyle/>
           <a:p>
-            <a:fld id="{2F437BE5-DDFB-4005-B8E6-F4EDF8F6ADAF}" type="slidenum">
+            <a:fld id="{983B056A-CDE9-4578-9916-10D9078A5DFB}" type="slidenum">
               <a:rPr kumimoji="1" lang="ja-JP" altLang="en-US" smtClean="0"/>
               <a:t>‹#›</a:t>
             </a:fld>
@@ -2243,7 +2243,7 @@
     </p:spTree>
     <p:extLst>
       <p:ext uri="{BB962C8B-B14F-4D97-AF65-F5344CB8AC3E}">
-        <p14:creationId xmlns:p14="http://schemas.microsoft.com/office/powerpoint/2010/main" val="1028370225"/>
+        <p14:creationId xmlns:p14="http://schemas.microsoft.com/office/powerpoint/2010/main" val="754195634"/>
       </p:ext>
     </p:extLst>
   </p:cSld>
@@ -2275,7 +2275,7 @@
           <p:cNvPr id="2" name="日付プレースホルダー 1">
             <a:extLst>
               <a:ext uri="{FF2B5EF4-FFF2-40B4-BE49-F238E27FC236}">
-                <a16:creationId xmlns:a16="http://schemas.microsoft.com/office/drawing/2014/main" id="{7A8EFDCC-2767-5C20-0FDC-16D219FC1335}"/>
+                <a16:creationId xmlns:a16="http://schemas.microsoft.com/office/drawing/2014/main" id="{14F3D652-FA16-107C-67AB-29407733F7D8}"/>
               </a:ext>
             </a:extLst>
           </p:cNvPr>
@@ -2291,7 +2291,7 @@
           <a:bodyPr/>
           <a:lstStyle/>
           <a:p>
-            <a:fld id="{F0308D24-4926-452D-9A00-10FD518294AA}" type="datetimeFigureOut">
+            <a:fld id="{8EBC7593-F991-4890-8707-0EA6C2F8869D}" type="datetimeFigureOut">
               <a:rPr kumimoji="1" lang="ja-JP" altLang="en-US" smtClean="0"/>
               <a:t>2026/7/30</a:t>
             </a:fld>
@@ -2304,7 +2304,7 @@
           <p:cNvPr id="3" name="フッター プレースホルダー 2">
             <a:extLst>
               <a:ext uri="{FF2B5EF4-FFF2-40B4-BE49-F238E27FC236}">
-                <a16:creationId xmlns:a16="http://schemas.microsoft.com/office/drawing/2014/main" id="{51422078-5301-E4E6-17BA-D4FA5F0AE664}"/>
+                <a16:creationId xmlns:a16="http://schemas.microsoft.com/office/drawing/2014/main" id="{3ABCFB4A-457E-7925-B1BB-8CF4BFF10C13}"/>
               </a:ext>
             </a:extLst>
           </p:cNvPr>
@@ -2329,7 +2329,7 @@
           <p:cNvPr id="4" name="スライド番号プレースホルダー 3">
             <a:extLst>
               <a:ext uri="{FF2B5EF4-FFF2-40B4-BE49-F238E27FC236}">
-                <a16:creationId xmlns:a16="http://schemas.microsoft.com/office/drawing/2014/main" id="{77BAF1B5-2462-105E-2F1D-212774C6D8D8}"/>
+                <a16:creationId xmlns:a16="http://schemas.microsoft.com/office/drawing/2014/main" id="{851357FA-556A-DBE7-7C2A-D06CF17F6482}"/>
               </a:ext>
             </a:extLst>
           </p:cNvPr>
@@ -2345,7 +2345,7 @@
           <a:bodyPr/>
           <a:lstStyle/>
           <a:p>
-            <a:fld id="{2F437BE5-DDFB-4005-B8E6-F4EDF8F6ADAF}" type="slidenum">
+            <a:fld id="{983B056A-CDE9-4578-9916-10D9078A5DFB}" type="slidenum">
               <a:rPr kumimoji="1" lang="ja-JP" altLang="en-US" smtClean="0"/>
               <a:t>‹#›</a:t>
             </a:fld>
@@ -2356,7 +2356,7 @@
     </p:spTree>
     <p:extLst>
       <p:ext uri="{BB962C8B-B14F-4D97-AF65-F5344CB8AC3E}">
-        <p14:creationId xmlns:p14="http://schemas.microsoft.com/office/powerpoint/2010/main" val="2497540025"/>
+        <p14:creationId xmlns:p14="http://schemas.microsoft.com/office/powerpoint/2010/main" val="2541490881"/>
       </p:ext>
     </p:extLst>
   </p:cSld>
@@ -2388,7 +2388,7 @@
           <p:cNvPr id="2" name="タイトル 1">
             <a:extLst>
               <a:ext uri="{FF2B5EF4-FFF2-40B4-BE49-F238E27FC236}">
-                <a16:creationId xmlns:a16="http://schemas.microsoft.com/office/drawing/2014/main" id="{398EA937-0C95-1CE8-37D6-ADCB8CD5934D}"/>
+                <a16:creationId xmlns:a16="http://schemas.microsoft.com/office/drawing/2014/main" id="{8E47082E-A87B-6D8C-A7E8-CDBA6857699A}"/>
               </a:ext>
             </a:extLst>
           </p:cNvPr>
@@ -2425,7 +2425,7 @@
           <p:cNvPr id="3" name="コンテンツ プレースホルダー 2">
             <a:extLst>
               <a:ext uri="{FF2B5EF4-FFF2-40B4-BE49-F238E27FC236}">
-                <a16:creationId xmlns:a16="http://schemas.microsoft.com/office/drawing/2014/main" id="{7C133D7C-466A-8CF7-CD08-238F04E21C9A}"/>
+                <a16:creationId xmlns:a16="http://schemas.microsoft.com/office/drawing/2014/main" id="{DC74F038-05E9-4A8B-2A05-BB98CD53694F}"/>
               </a:ext>
             </a:extLst>
           </p:cNvPr>
@@ -2547,7 +2547,7 @@
           <p:cNvPr id="4" name="テキスト プレースホルダー 3">
             <a:extLst>
               <a:ext uri="{FF2B5EF4-FFF2-40B4-BE49-F238E27FC236}">
-                <a16:creationId xmlns:a16="http://schemas.microsoft.com/office/drawing/2014/main" id="{DF2DB288-E3BA-0CEB-C8B7-C3DC94719C71}"/>
+                <a16:creationId xmlns:a16="http://schemas.microsoft.com/office/drawing/2014/main" id="{C4437BEA-D256-F46D-0FE2-D219AB6A9CD2}"/>
               </a:ext>
             </a:extLst>
           </p:cNvPr>
@@ -2618,7 +2618,7 @@
           <p:cNvPr id="5" name="日付プレースホルダー 4">
             <a:extLst>
               <a:ext uri="{FF2B5EF4-FFF2-40B4-BE49-F238E27FC236}">
-                <a16:creationId xmlns:a16="http://schemas.microsoft.com/office/drawing/2014/main" id="{07622FBD-9B26-751F-2331-CCB2AAEC28E5}"/>
+                <a16:creationId xmlns:a16="http://schemas.microsoft.com/office/drawing/2014/main" id="{CA6412D4-E4E6-2B22-0115-3327333D84C6}"/>
               </a:ext>
             </a:extLst>
           </p:cNvPr>
@@ -2634,7 +2634,7 @@
           <a:bodyPr/>
           <a:lstStyle/>
           <a:p>
-            <a:fld id="{F0308D24-4926-452D-9A00-10FD518294AA}" type="datetimeFigureOut">
+            <a:fld id="{8EBC7593-F991-4890-8707-0EA6C2F8869D}" type="datetimeFigureOut">
               <a:rPr kumimoji="1" lang="ja-JP" altLang="en-US" smtClean="0"/>
               <a:t>2026/7/30</a:t>
             </a:fld>
@@ -2647,7 +2647,7 @@
           <p:cNvPr id="6" name="フッター プレースホルダー 5">
             <a:extLst>
               <a:ext uri="{FF2B5EF4-FFF2-40B4-BE49-F238E27FC236}">
-                <a16:creationId xmlns:a16="http://schemas.microsoft.com/office/drawing/2014/main" id="{8A70AF6A-3C06-8AA1-4D59-CB2725ADD743}"/>
+                <a16:creationId xmlns:a16="http://schemas.microsoft.com/office/drawing/2014/main" id="{EFB53953-D8B3-D9EC-2443-DA4C60BC91D7}"/>
               </a:ext>
             </a:extLst>
           </p:cNvPr>
@@ -2672,7 +2672,7 @@
           <p:cNvPr id="7" name="スライド番号プレースホルダー 6">
             <a:extLst>
               <a:ext uri="{FF2B5EF4-FFF2-40B4-BE49-F238E27FC236}">
-                <a16:creationId xmlns:a16="http://schemas.microsoft.com/office/drawing/2014/main" id="{2C138BBE-75C8-A466-D2B1-208D024CE3B6}"/>
+                <a16:creationId xmlns:a16="http://schemas.microsoft.com/office/drawing/2014/main" id="{875893AB-19AF-F38E-50BB-0A038F9B7FD7}"/>
               </a:ext>
             </a:extLst>
           </p:cNvPr>
@@ -2688,7 +2688,7 @@
           <a:bodyPr/>
           <a:lstStyle/>
           <a:p>
-            <a:fld id="{2F437BE5-DDFB-4005-B8E6-F4EDF8F6ADAF}" type="slidenum">
+            <a:fld id="{983B056A-CDE9-4578-9916-10D9078A5DFB}" type="slidenum">
               <a:rPr kumimoji="1" lang="ja-JP" altLang="en-US" smtClean="0"/>
               <a:t>‹#›</a:t>
             </a:fld>
@@ -2699,7 +2699,7 @@
     </p:spTree>
     <p:extLst>
       <p:ext uri="{BB962C8B-B14F-4D97-AF65-F5344CB8AC3E}">
-        <p14:creationId xmlns:p14="http://schemas.microsoft.com/office/powerpoint/2010/main" val="2618614206"/>
+        <p14:creationId xmlns:p14="http://schemas.microsoft.com/office/powerpoint/2010/main" val="3072655552"/>
       </p:ext>
     </p:extLst>
   </p:cSld>
@@ -2731,7 +2731,7 @@
           <p:cNvPr id="2" name="タイトル 1">
             <a:extLst>
               <a:ext uri="{FF2B5EF4-FFF2-40B4-BE49-F238E27FC236}">
-                <a16:creationId xmlns:a16="http://schemas.microsoft.com/office/drawing/2014/main" id="{7E8D8F91-04BC-FAE5-2E76-46322AC23B93}"/>
+                <a16:creationId xmlns:a16="http://schemas.microsoft.com/office/drawing/2014/main" id="{53037800-726F-8EAF-088C-53165524B596}"/>
               </a:ext>
             </a:extLst>
           </p:cNvPr>
@@ -2768,7 +2768,7 @@
           <p:cNvPr id="3" name="図プレースホルダー 2">
             <a:extLst>
               <a:ext uri="{FF2B5EF4-FFF2-40B4-BE49-F238E27FC236}">
-                <a16:creationId xmlns:a16="http://schemas.microsoft.com/office/drawing/2014/main" id="{A6E77F76-427E-6756-8003-6BBF4A30C76C}"/>
+                <a16:creationId xmlns:a16="http://schemas.microsoft.com/office/drawing/2014/main" id="{B7DF1C47-B5DB-431C-8522-D612B299A57E}"/>
               </a:ext>
             </a:extLst>
           </p:cNvPr>
@@ -2835,7 +2835,7 @@
           <p:cNvPr id="4" name="テキスト プレースホルダー 3">
             <a:extLst>
               <a:ext uri="{FF2B5EF4-FFF2-40B4-BE49-F238E27FC236}">
-                <a16:creationId xmlns:a16="http://schemas.microsoft.com/office/drawing/2014/main" id="{50FD7939-3403-4220-12F0-AE6EC7225CFB}"/>
+                <a16:creationId xmlns:a16="http://schemas.microsoft.com/office/drawing/2014/main" id="{17611F80-ADC4-4E91-7FC5-7E8C222D328A}"/>
               </a:ext>
             </a:extLst>
           </p:cNvPr>
@@ -2906,7 +2906,7 @@
           <p:cNvPr id="5" name="日付プレースホルダー 4">
             <a:extLst>
               <a:ext uri="{FF2B5EF4-FFF2-40B4-BE49-F238E27FC236}">
-                <a16:creationId xmlns:a16="http://schemas.microsoft.com/office/drawing/2014/main" id="{51986430-FF24-DBB5-051B-3F3FCF62CE59}"/>
+                <a16:creationId xmlns:a16="http://schemas.microsoft.com/office/drawing/2014/main" id="{49D1B625-4329-ACE1-DF04-58A36F616218}"/>
               </a:ext>
             </a:extLst>
           </p:cNvPr>
@@ -2922,7 +2922,7 @@
           <a:bodyPr/>
           <a:lstStyle/>
           <a:p>
-            <a:fld id="{F0308D24-4926-452D-9A00-10FD518294AA}" type="datetimeFigureOut">
+            <a:fld id="{8EBC7593-F991-4890-8707-0EA6C2F8869D}" type="datetimeFigureOut">
               <a:rPr kumimoji="1" lang="ja-JP" altLang="en-US" smtClean="0"/>
               <a:t>2026/7/30</a:t>
             </a:fld>
@@ -2935,7 +2935,7 @@
           <p:cNvPr id="6" name="フッター プレースホルダー 5">
             <a:extLst>
               <a:ext uri="{FF2B5EF4-FFF2-40B4-BE49-F238E27FC236}">
-                <a16:creationId xmlns:a16="http://schemas.microsoft.com/office/drawing/2014/main" id="{49E5A9FB-19A1-082E-3B5D-D843F62D30BC}"/>
+                <a16:creationId xmlns:a16="http://schemas.microsoft.com/office/drawing/2014/main" id="{148678AA-7BEF-BF0F-6F72-5D9B1F6F7C45}"/>
               </a:ext>
             </a:extLst>
           </p:cNvPr>
@@ -2960,7 +2960,7 @@
           <p:cNvPr id="7" name="スライド番号プレースホルダー 6">
             <a:extLst>
               <a:ext uri="{FF2B5EF4-FFF2-40B4-BE49-F238E27FC236}">
-                <a16:creationId xmlns:a16="http://schemas.microsoft.com/office/drawing/2014/main" id="{9E037021-DD48-3588-E952-7EE7BD10D662}"/>
+                <a16:creationId xmlns:a16="http://schemas.microsoft.com/office/drawing/2014/main" id="{2ECD05E9-320B-A884-584E-DA682407BDB6}"/>
               </a:ext>
             </a:extLst>
           </p:cNvPr>
@@ -2976,7 +2976,7 @@
           <a:bodyPr/>
           <a:lstStyle/>
           <a:p>
-            <a:fld id="{2F437BE5-DDFB-4005-B8E6-F4EDF8F6ADAF}" type="slidenum">
+            <a:fld id="{983B056A-CDE9-4578-9916-10D9078A5DFB}" type="slidenum">
               <a:rPr kumimoji="1" lang="ja-JP" altLang="en-US" smtClean="0"/>
               <a:t>‹#›</a:t>
             </a:fld>
@@ -2987,7 +2987,7 @@
     </p:spTree>
     <p:extLst>
       <p:ext uri="{BB962C8B-B14F-4D97-AF65-F5344CB8AC3E}">
-        <p14:creationId xmlns:p14="http://schemas.microsoft.com/office/powerpoint/2010/main" val="2310656974"/>
+        <p14:creationId xmlns:p14="http://schemas.microsoft.com/office/powerpoint/2010/main" val="1870674732"/>
       </p:ext>
     </p:extLst>
   </p:cSld>
@@ -3024,7 +3024,7 @@
           <p:cNvPr id="2" name="タイトル プレースホルダー 1">
             <a:extLst>
               <a:ext uri="{FF2B5EF4-FFF2-40B4-BE49-F238E27FC236}">
-                <a16:creationId xmlns:a16="http://schemas.microsoft.com/office/drawing/2014/main" id="{5170E4BD-EC87-763B-2DBE-C4ACCAC18FDD}"/>
+                <a16:creationId xmlns:a16="http://schemas.microsoft.com/office/drawing/2014/main" id="{1D8FE964-EA69-5A1D-EDE8-28402EFE779A}"/>
               </a:ext>
             </a:extLst>
           </p:cNvPr>
@@ -3062,7 +3062,7 @@
           <p:cNvPr id="3" name="テキスト プレースホルダー 2">
             <a:extLst>
               <a:ext uri="{FF2B5EF4-FFF2-40B4-BE49-F238E27FC236}">
-                <a16:creationId xmlns:a16="http://schemas.microsoft.com/office/drawing/2014/main" id="{69468E03-B2D5-B72C-95A7-36D79DC54D0D}"/>
+                <a16:creationId xmlns:a16="http://schemas.microsoft.com/office/drawing/2014/main" id="{90B98958-860F-FDF1-E6DA-96D64D925476}"/>
               </a:ext>
             </a:extLst>
           </p:cNvPr>
@@ -3161,7 +3161,7 @@
           <p:cNvPr id="4" name="日付プレースホルダー 3">
             <a:extLst>
               <a:ext uri="{FF2B5EF4-FFF2-40B4-BE49-F238E27FC236}">
-                <a16:creationId xmlns:a16="http://schemas.microsoft.com/office/drawing/2014/main" id="{62C7398D-2667-585F-C1B6-E5901AC5901C}"/>
+                <a16:creationId xmlns:a16="http://schemas.microsoft.com/office/drawing/2014/main" id="{6A7EB8D6-9FBF-2BD2-2115-6C9C4A17D9AF}"/>
               </a:ext>
             </a:extLst>
           </p:cNvPr>
@@ -3195,7 +3195,7 @@
             </a:lvl1pPr>
           </a:lstStyle>
           <a:p>
-            <a:fld id="{F0308D24-4926-452D-9A00-10FD518294AA}" type="datetimeFigureOut">
+            <a:fld id="{8EBC7593-F991-4890-8707-0EA6C2F8869D}" type="datetimeFigureOut">
               <a:rPr kumimoji="1" lang="ja-JP" altLang="en-US" smtClean="0"/>
               <a:t>2026/7/30</a:t>
             </a:fld>
@@ -3208,7 +3208,7 @@
           <p:cNvPr id="5" name="フッター プレースホルダー 4">
             <a:extLst>
               <a:ext uri="{FF2B5EF4-FFF2-40B4-BE49-F238E27FC236}">
-                <a16:creationId xmlns:a16="http://schemas.microsoft.com/office/drawing/2014/main" id="{1A84FAFA-48A4-C0EE-115A-EBCB8B753C63}"/>
+                <a16:creationId xmlns:a16="http://schemas.microsoft.com/office/drawing/2014/main" id="{8B566DF9-A644-9836-8D24-4679C8567360}"/>
               </a:ext>
             </a:extLst>
           </p:cNvPr>
@@ -3251,7 +3251,7 @@
           <p:cNvPr id="6" name="スライド番号プレースホルダー 5">
             <a:extLst>
               <a:ext uri="{FF2B5EF4-FFF2-40B4-BE49-F238E27FC236}">
-                <a16:creationId xmlns:a16="http://schemas.microsoft.com/office/drawing/2014/main" id="{793B7877-89DB-36A8-0C1B-DD325F9BE973}"/>
+                <a16:creationId xmlns:a16="http://schemas.microsoft.com/office/drawing/2014/main" id="{A890CBAD-3214-23A3-B2E1-ED5FC2C251EE}"/>
               </a:ext>
             </a:extLst>
           </p:cNvPr>
@@ -3285,7 +3285,7 @@
             </a:lvl1pPr>
           </a:lstStyle>
           <a:p>
-            <a:fld id="{2F437BE5-DDFB-4005-B8E6-F4EDF8F6ADAF}" type="slidenum">
+            <a:fld id="{983B056A-CDE9-4578-9916-10D9078A5DFB}" type="slidenum">
               <a:rPr kumimoji="1" lang="ja-JP" altLang="en-US" smtClean="0"/>
               <a:t>‹#›</a:t>
             </a:fld>
@@ -3296,7 +3296,7 @@
     </p:spTree>
     <p:extLst>
       <p:ext uri="{BB962C8B-B14F-4D97-AF65-F5344CB8AC3E}">
-        <p14:creationId xmlns:p14="http://schemas.microsoft.com/office/powerpoint/2010/main" val="2623938748"/>
+        <p14:creationId xmlns:p14="http://schemas.microsoft.com/office/powerpoint/2010/main" val="3258026257"/>
       </p:ext>
     </p:extLst>
   </p:cSld>
@@ -3619,7 +3619,7 @@
           <p:cNvPr id="2" name="テキスト ボックス 1">
             <a:extLst>
               <a:ext uri="{FF2B5EF4-FFF2-40B4-BE49-F238E27FC236}">
-                <a16:creationId xmlns:a16="http://schemas.microsoft.com/office/drawing/2014/main" id="{F5727F6C-95F1-3869-D11F-9E2130C7D1CC}"/>
+                <a16:creationId xmlns:a16="http://schemas.microsoft.com/office/drawing/2014/main" id="{590E33F2-B420-5894-26F9-1625398E90B5}"/>
               </a:ext>
             </a:extLst>
           </p:cNvPr>
@@ -3665,7 +3665,7 @@
           <p:cNvPr id="3" name="テキスト ボックス 2">
             <a:extLst>
               <a:ext uri="{FF2B5EF4-FFF2-40B4-BE49-F238E27FC236}">
-                <a16:creationId xmlns:a16="http://schemas.microsoft.com/office/drawing/2014/main" id="{58B12898-66CA-80BF-992F-7CD36A7A85B9}"/>
+                <a16:creationId xmlns:a16="http://schemas.microsoft.com/office/drawing/2014/main" id="{613101AA-82A2-E16F-A6D5-7171B2FEB767}"/>
               </a:ext>
             </a:extLst>
           </p:cNvPr>
@@ -3714,7 +3714,7 @@
           <p:cNvPr id="4" name="テキスト ボックス 3">
             <a:extLst>
               <a:ext uri="{FF2B5EF4-FFF2-40B4-BE49-F238E27FC236}">
-                <a16:creationId xmlns:a16="http://schemas.microsoft.com/office/drawing/2014/main" id="{425BAA81-DDE8-E39F-57FC-D93D2E3FB796}"/>
+                <a16:creationId xmlns:a16="http://schemas.microsoft.com/office/drawing/2014/main" id="{0D012DC2-1414-DE51-E5E7-754E152561D8}"/>
               </a:ext>
             </a:extLst>
           </p:cNvPr>
@@ -3754,7 +3754,7 @@
           <p:cNvPr id="5" name="テキスト ボックス 4">
             <a:extLst>
               <a:ext uri="{FF2B5EF4-FFF2-40B4-BE49-F238E27FC236}">
-                <a16:creationId xmlns:a16="http://schemas.microsoft.com/office/drawing/2014/main" id="{C315B105-88D8-85F5-F654-637BAA8F9661}"/>
+                <a16:creationId xmlns:a16="http://schemas.microsoft.com/office/drawing/2014/main" id="{C80D0F4D-927C-A63C-0321-C2641056D5CB}"/>
               </a:ext>
             </a:extLst>
           </p:cNvPr>
@@ -3801,7 +3801,7 @@
             <a:hlinkClick r:id="" action="ppaction://media"/>
             <a:extLst>
               <a:ext uri="{FF2B5EF4-FFF2-40B4-BE49-F238E27FC236}">
-                <a16:creationId xmlns:a16="http://schemas.microsoft.com/office/drawing/2014/main" id="{94E73DF8-9928-807D-D58F-B14CB08DC843}"/>
+                <a16:creationId xmlns:a16="http://schemas.microsoft.com/office/drawing/2014/main" id="{C659342F-72C0-7E81-7FCE-C9A09A0A57B9}"/>
               </a:ext>
             </a:extLst>
           </p:cNvPr>
@@ -3836,7 +3836,7 @@
     </p:spTree>
     <p:extLst>
       <p:ext uri="{BB962C8B-B14F-4D97-AF65-F5344CB8AC3E}">
-        <p14:creationId xmlns:p14="http://schemas.microsoft.com/office/powerpoint/2010/main" val="1511070436"/>
+        <p14:creationId xmlns:p14="http://schemas.microsoft.com/office/powerpoint/2010/main" val="2906901998"/>
       </p:ext>
     </p:extLst>
   </p:cSld>
@@ -3960,7 +3960,7 @@
           <p:cNvPr id="2" name="テキスト ボックス 1">
             <a:extLst>
               <a:ext uri="{FF2B5EF4-FFF2-40B4-BE49-F238E27FC236}">
-                <a16:creationId xmlns:a16="http://schemas.microsoft.com/office/drawing/2014/main" id="{9CF8F6CF-D34D-8FB2-B891-EC6AAA59285C}"/>
+                <a16:creationId xmlns:a16="http://schemas.microsoft.com/office/drawing/2014/main" id="{3AFC06C1-DA4E-34C9-6A25-F336D2DCF4E1}"/>
               </a:ext>
             </a:extLst>
           </p:cNvPr>
@@ -4006,7 +4006,7 @@
           <p:cNvPr id="3" name="テキスト ボックス 2">
             <a:extLst>
               <a:ext uri="{FF2B5EF4-FFF2-40B4-BE49-F238E27FC236}">
-                <a16:creationId xmlns:a16="http://schemas.microsoft.com/office/drawing/2014/main" id="{0FE511B9-2A09-5187-5146-F1E62019EAE8}"/>
+                <a16:creationId xmlns:a16="http://schemas.microsoft.com/office/drawing/2014/main" id="{ACFBB3EF-9340-A14E-06B6-1880B01294D5}"/>
               </a:ext>
             </a:extLst>
           </p:cNvPr>
@@ -4046,7 +4046,7 @@
           <p:cNvPr id="4" name="テキスト ボックス 3">
             <a:extLst>
               <a:ext uri="{FF2B5EF4-FFF2-40B4-BE49-F238E27FC236}">
-                <a16:creationId xmlns:a16="http://schemas.microsoft.com/office/drawing/2014/main" id="{77CEC116-0B60-73F4-49DF-D184F8D15126}"/>
+                <a16:creationId xmlns:a16="http://schemas.microsoft.com/office/drawing/2014/main" id="{065F9108-5C65-F361-C197-169E889EA7C2}"/>
               </a:ext>
             </a:extLst>
           </p:cNvPr>
@@ -4076,14 +4076,17 @@
                 </a:solidFill>
                 <a:latin typeface="Arial" panose="020B0604020202020204" pitchFamily="34" charset="0"/>
               </a:rPr>
-              <a:t>vinext starter A clean full stack starter running on vinext https://github</a:t>
-            </a:r>
-            <a:endParaRPr kumimoji="1" lang="ja-JP" altLang="en-US" sz="2000">
-              <a:solidFill>
-                <a:srgbClr val="333333"/>
-              </a:solidFill>
-              <a:latin typeface="Arial" panose="020B0604020202020204" pitchFamily="34" charset="0"/>
-            </a:endParaRPr>
+              <a:t>Oshi Trip Alert</a:t>
+            </a:r>
+            <a:r>
+              <a:rPr kumimoji="1" lang="ja-JP" altLang="en-US" sz="2000">
+                <a:solidFill>
+                  <a:srgbClr val="333333"/>
+                </a:solidFill>
+                <a:latin typeface="Arial" panose="020B0604020202020204" pitchFamily="34" charset="0"/>
+              </a:rPr>
+              <a:t>の目的、構成、実装を公開コードから確認できるプロジェクトです。</a:t>
+            </a:r>
           </a:p>
         </p:txBody>
       </p:sp>
@@ -4092,7 +4095,7 @@
           <p:cNvPr id="5" name="テキスト ボックス 4">
             <a:extLst>
               <a:ext uri="{FF2B5EF4-FFF2-40B4-BE49-F238E27FC236}">
-                <a16:creationId xmlns:a16="http://schemas.microsoft.com/office/drawing/2014/main" id="{484DD720-3478-8E0D-FDFE-5D9841A1D2B4}"/>
+                <a16:creationId xmlns:a16="http://schemas.microsoft.com/office/drawing/2014/main" id="{9D349627-4BA4-DC83-4E91-B20DF1A70A0A}"/>
               </a:ext>
             </a:extLst>
           </p:cNvPr>
@@ -4139,7 +4142,7 @@
             <a:hlinkClick r:id="" action="ppaction://media"/>
             <a:extLst>
               <a:ext uri="{FF2B5EF4-FFF2-40B4-BE49-F238E27FC236}">
-                <a16:creationId xmlns:a16="http://schemas.microsoft.com/office/drawing/2014/main" id="{7BC92550-8266-B7A5-F842-99EF351293F5}"/>
+                <a16:creationId xmlns:a16="http://schemas.microsoft.com/office/drawing/2014/main" id="{6AFF2A3D-5BC5-9DBC-5FB4-AB0DD8AA3936}"/>
               </a:ext>
             </a:extLst>
           </p:cNvPr>
@@ -4174,7 +4177,7 @@
     </p:spTree>
     <p:extLst>
       <p:ext uri="{BB962C8B-B14F-4D97-AF65-F5344CB8AC3E}">
-        <p14:creationId xmlns:p14="http://schemas.microsoft.com/office/powerpoint/2010/main" val="2551024582"/>
+        <p14:creationId xmlns:p14="http://schemas.microsoft.com/office/powerpoint/2010/main" val="1292008685"/>
       </p:ext>
     </p:extLst>
   </p:cSld>
@@ -4217,7 +4220,7 @@
                                   <p:childTnLst>
                                     <p:cmd type="call" cmd="playFrom(0.0)">
                                       <p:cBhvr>
-                                        <p:cTn id="6" dur="7955" fill="hold"/>
+                                        <p:cTn id="6" dur="7391" fill="hold"/>
                                         <p:tgtEl>
                                           <p:spTgt spid="6"/>
                                         </p:tgtEl>
@@ -4298,7 +4301,7 @@
           <p:cNvPr id="2" name="テキスト ボックス 1">
             <a:extLst>
               <a:ext uri="{FF2B5EF4-FFF2-40B4-BE49-F238E27FC236}">
-                <a16:creationId xmlns:a16="http://schemas.microsoft.com/office/drawing/2014/main" id="{E81E67B1-F84A-13F7-62FA-46855AD03F8B}"/>
+                <a16:creationId xmlns:a16="http://schemas.microsoft.com/office/drawing/2014/main" id="{166FD2DF-D031-57A3-BBA8-AEDA3F0752A8}"/>
               </a:ext>
             </a:extLst>
           </p:cNvPr>
@@ -4344,7 +4347,7 @@
           <p:cNvPr id="3" name="テキスト ボックス 2">
             <a:extLst>
               <a:ext uri="{FF2B5EF4-FFF2-40B4-BE49-F238E27FC236}">
-                <a16:creationId xmlns:a16="http://schemas.microsoft.com/office/drawing/2014/main" id="{6CC60BAA-0273-60FF-8327-C9B0515FAD5B}"/>
+                <a16:creationId xmlns:a16="http://schemas.microsoft.com/office/drawing/2014/main" id="{FE040EB4-2E87-7018-589D-FAA8FCFC5C96}"/>
               </a:ext>
             </a:extLst>
           </p:cNvPr>
@@ -4384,7 +4387,7 @@
           <p:cNvPr id="4" name="テキスト ボックス 3">
             <a:extLst>
               <a:ext uri="{FF2B5EF4-FFF2-40B4-BE49-F238E27FC236}">
-                <a16:creationId xmlns:a16="http://schemas.microsoft.com/office/drawing/2014/main" id="{D3350CD1-1069-3A4D-52CA-C4596371FA50}"/>
+                <a16:creationId xmlns:a16="http://schemas.microsoft.com/office/drawing/2014/main" id="{A7D9B97F-00E5-8069-3362-878C50FE3B80}"/>
               </a:ext>
             </a:extLst>
           </p:cNvPr>
@@ -4461,7 +4464,7 @@
           <p:cNvPr id="5" name="テキスト ボックス 4">
             <a:extLst>
               <a:ext uri="{FF2B5EF4-FFF2-40B4-BE49-F238E27FC236}">
-                <a16:creationId xmlns:a16="http://schemas.microsoft.com/office/drawing/2014/main" id="{070487EC-092D-4021-CBD9-D04AE2FB35C5}"/>
+                <a16:creationId xmlns:a16="http://schemas.microsoft.com/office/drawing/2014/main" id="{E7BF34E2-C674-E9C4-6B03-B2460E265BDD}"/>
               </a:ext>
             </a:extLst>
           </p:cNvPr>
@@ -4508,7 +4511,7 @@
             <a:hlinkClick r:id="" action="ppaction://media"/>
             <a:extLst>
               <a:ext uri="{FF2B5EF4-FFF2-40B4-BE49-F238E27FC236}">
-                <a16:creationId xmlns:a16="http://schemas.microsoft.com/office/drawing/2014/main" id="{EBBE89FF-1E73-7830-7B92-16C6481457CD}"/>
+                <a16:creationId xmlns:a16="http://schemas.microsoft.com/office/drawing/2014/main" id="{9B7B31C3-A97A-2C0B-35B4-F2E689C07717}"/>
               </a:ext>
             </a:extLst>
           </p:cNvPr>
@@ -4543,7 +4546,7 @@
     </p:spTree>
     <p:extLst>
       <p:ext uri="{BB962C8B-B14F-4D97-AF65-F5344CB8AC3E}">
-        <p14:creationId xmlns:p14="http://schemas.microsoft.com/office/powerpoint/2010/main" val="3626396983"/>
+        <p14:creationId xmlns:p14="http://schemas.microsoft.com/office/powerpoint/2010/main" val="2032796917"/>
       </p:ext>
     </p:extLst>
   </p:cSld>
@@ -4667,7 +4670,7 @@
           <p:cNvPr id="2" name="テキスト ボックス 1">
             <a:extLst>
               <a:ext uri="{FF2B5EF4-FFF2-40B4-BE49-F238E27FC236}">
-                <a16:creationId xmlns:a16="http://schemas.microsoft.com/office/drawing/2014/main" id="{241476CC-7FB6-60C3-64DB-E24BE4133E8D}"/>
+                <a16:creationId xmlns:a16="http://schemas.microsoft.com/office/drawing/2014/main" id="{0AF7F46B-BB30-1618-306D-A71B02DC886B}"/>
               </a:ext>
             </a:extLst>
           </p:cNvPr>
@@ -4713,7 +4716,7 @@
           <p:cNvPr id="3" name="テキスト ボックス 2">
             <a:extLst>
               <a:ext uri="{FF2B5EF4-FFF2-40B4-BE49-F238E27FC236}">
-                <a16:creationId xmlns:a16="http://schemas.microsoft.com/office/drawing/2014/main" id="{72EBAFBE-81BE-303B-D022-A94421365EBC}"/>
+                <a16:creationId xmlns:a16="http://schemas.microsoft.com/office/drawing/2014/main" id="{2BF0AA10-323E-4030-2379-A61EFF6FE507}"/>
               </a:ext>
             </a:extLst>
           </p:cNvPr>
@@ -4753,7 +4756,7 @@
           <p:cNvPr id="4" name="テキスト ボックス 3">
             <a:extLst>
               <a:ext uri="{FF2B5EF4-FFF2-40B4-BE49-F238E27FC236}">
-                <a16:creationId xmlns:a16="http://schemas.microsoft.com/office/drawing/2014/main" id="{F579CACA-98AF-22ED-B665-1D113B72B307}"/>
+                <a16:creationId xmlns:a16="http://schemas.microsoft.com/office/drawing/2014/main" id="{3999459B-0BD2-82CD-E3CA-9CBF9035AF0D}"/>
               </a:ext>
             </a:extLst>
           </p:cNvPr>
@@ -4863,7 +4866,7 @@
           <p:cNvPr id="5" name="テキスト ボックス 4">
             <a:extLst>
               <a:ext uri="{FF2B5EF4-FFF2-40B4-BE49-F238E27FC236}">
-                <a16:creationId xmlns:a16="http://schemas.microsoft.com/office/drawing/2014/main" id="{8C1CCFF4-8B2C-80C6-32B7-5E76DBC140CE}"/>
+                <a16:creationId xmlns:a16="http://schemas.microsoft.com/office/drawing/2014/main" id="{45F473E5-CDA2-D3A8-50FB-E6A50D069B6F}"/>
               </a:ext>
             </a:extLst>
           </p:cNvPr>
@@ -4910,7 +4913,7 @@
             <a:hlinkClick r:id="" action="ppaction://media"/>
             <a:extLst>
               <a:ext uri="{FF2B5EF4-FFF2-40B4-BE49-F238E27FC236}">
-                <a16:creationId xmlns:a16="http://schemas.microsoft.com/office/drawing/2014/main" id="{0DD457D9-6961-6F40-C85F-F19AA7398089}"/>
+                <a16:creationId xmlns:a16="http://schemas.microsoft.com/office/drawing/2014/main" id="{466182EE-06D0-A948-24BF-FCFD5823C91F}"/>
               </a:ext>
             </a:extLst>
           </p:cNvPr>
@@ -4945,7 +4948,7 @@
     </p:spTree>
     <p:extLst>
       <p:ext uri="{BB962C8B-B14F-4D97-AF65-F5344CB8AC3E}">
-        <p14:creationId xmlns:p14="http://schemas.microsoft.com/office/powerpoint/2010/main" val="2655597012"/>
+        <p14:creationId xmlns:p14="http://schemas.microsoft.com/office/powerpoint/2010/main" val="4133857708"/>
       </p:ext>
     </p:extLst>
   </p:cSld>
@@ -5069,7 +5072,7 @@
           <p:cNvPr id="2" name="テキスト ボックス 1">
             <a:extLst>
               <a:ext uri="{FF2B5EF4-FFF2-40B4-BE49-F238E27FC236}">
-                <a16:creationId xmlns:a16="http://schemas.microsoft.com/office/drawing/2014/main" id="{F19F955A-AFFE-7EFD-65A2-7C1A5597E1B7}"/>
+                <a16:creationId xmlns:a16="http://schemas.microsoft.com/office/drawing/2014/main" id="{CD054788-4612-7D77-045C-0600DB47260D}"/>
               </a:ext>
             </a:extLst>
           </p:cNvPr>
@@ -5115,7 +5118,7 @@
           <p:cNvPr id="3" name="テキスト ボックス 2">
             <a:extLst>
               <a:ext uri="{FF2B5EF4-FFF2-40B4-BE49-F238E27FC236}">
-                <a16:creationId xmlns:a16="http://schemas.microsoft.com/office/drawing/2014/main" id="{F3E03E41-5EF9-B34C-74BF-A26A0F949E74}"/>
+                <a16:creationId xmlns:a16="http://schemas.microsoft.com/office/drawing/2014/main" id="{C3E4FD1D-95B8-4C80-5950-CA367B70BEB4}"/>
               </a:ext>
             </a:extLst>
           </p:cNvPr>
@@ -5155,7 +5158,7 @@
           <p:cNvPr id="4" name="テキスト ボックス 3">
             <a:extLst>
               <a:ext uri="{FF2B5EF4-FFF2-40B4-BE49-F238E27FC236}">
-                <a16:creationId xmlns:a16="http://schemas.microsoft.com/office/drawing/2014/main" id="{2514CC1F-C1C8-9123-0660-A29DC49076F3}"/>
+                <a16:creationId xmlns:a16="http://schemas.microsoft.com/office/drawing/2014/main" id="{2795155F-7DEB-0319-228A-A1A8AAFD2AB6}"/>
               </a:ext>
             </a:extLst>
           </p:cNvPr>
@@ -5179,20 +5182,14 @@
           <a:lstStyle/>
           <a:p>
             <a:r>
-              <a:rPr kumimoji="1" lang="en-US" altLang="ja-JP" sz="2000">
+              <a:rPr kumimoji="1" lang="ja-JP" altLang="en-US" sz="2000">
                 <a:solidFill>
                   <a:srgbClr val="333333"/>
                 </a:solidFill>
                 <a:latin typeface="Arial" panose="020B0604020202020204" pitchFamily="34" charset="0"/>
               </a:rPr>
-              <a:t>Configure private site hosting</a:t>
-            </a:r>
-            <a:endParaRPr kumimoji="1" lang="ja-JP" altLang="en-US" sz="2000">
-              <a:solidFill>
-                <a:srgbClr val="333333"/>
-              </a:solidFill>
-              <a:latin typeface="Arial" panose="020B0604020202020204" pitchFamily="34" charset="0"/>
-            </a:endParaRPr>
+              <a:t>直近のコミットでは、実装の見直しと継続的な改善が行われました。</a:t>
+            </a:r>
           </a:p>
         </p:txBody>
       </p:sp>
@@ -5201,7 +5198,7 @@
           <p:cNvPr id="5" name="テキスト ボックス 4">
             <a:extLst>
               <a:ext uri="{FF2B5EF4-FFF2-40B4-BE49-F238E27FC236}">
-                <a16:creationId xmlns:a16="http://schemas.microsoft.com/office/drawing/2014/main" id="{B024C1B1-67B2-ACA9-BDD4-2FA5BF05FCA7}"/>
+                <a16:creationId xmlns:a16="http://schemas.microsoft.com/office/drawing/2014/main" id="{29778B8D-6399-409F-27BA-F64168E2AB0E}"/>
               </a:ext>
             </a:extLst>
           </p:cNvPr>
@@ -5248,7 +5245,7 @@
             <a:hlinkClick r:id="" action="ppaction://media"/>
             <a:extLst>
               <a:ext uri="{FF2B5EF4-FFF2-40B4-BE49-F238E27FC236}">
-                <a16:creationId xmlns:a16="http://schemas.microsoft.com/office/drawing/2014/main" id="{C175CDAE-F4CF-3327-0C52-9375EC76B48A}"/>
+                <a16:creationId xmlns:a16="http://schemas.microsoft.com/office/drawing/2014/main" id="{6E4602D2-2EE1-97A7-AC20-EB730FB08F77}"/>
               </a:ext>
             </a:extLst>
           </p:cNvPr>
@@ -5283,7 +5280,7 @@
     </p:spTree>
     <p:extLst>
       <p:ext uri="{BB962C8B-B14F-4D97-AF65-F5344CB8AC3E}">
-        <p14:creationId xmlns:p14="http://schemas.microsoft.com/office/powerpoint/2010/main" val="2063830235"/>
+        <p14:creationId xmlns:p14="http://schemas.microsoft.com/office/powerpoint/2010/main" val="2746602386"/>
       </p:ext>
     </p:extLst>
   </p:cSld>
@@ -5326,7 +5323,7 @@
                                   <p:childTnLst>
                                     <p:cmd type="call" cmd="playFrom(0.0)">
                                       <p:cBhvr>
-                                        <p:cTn id="6" dur="6621" fill="hold"/>
+                                        <p:cTn id="6" dur="6076" fill="hold"/>
                                         <p:tgtEl>
                                           <p:spTgt spid="6"/>
                                         </p:tgtEl>
@@ -5407,7 +5404,7 @@
           <p:cNvPr id="2" name="テキスト ボックス 1">
             <a:extLst>
               <a:ext uri="{FF2B5EF4-FFF2-40B4-BE49-F238E27FC236}">
-                <a16:creationId xmlns:a16="http://schemas.microsoft.com/office/drawing/2014/main" id="{B40DFE50-4978-002A-A52F-AC4D6ACEF9E3}"/>
+                <a16:creationId xmlns:a16="http://schemas.microsoft.com/office/drawing/2014/main" id="{EE87C329-7342-12EE-D95E-345CFB651C59}"/>
               </a:ext>
             </a:extLst>
           </p:cNvPr>
@@ -5453,7 +5450,7 @@
           <p:cNvPr id="3" name="テキスト ボックス 2">
             <a:extLst>
               <a:ext uri="{FF2B5EF4-FFF2-40B4-BE49-F238E27FC236}">
-                <a16:creationId xmlns:a16="http://schemas.microsoft.com/office/drawing/2014/main" id="{16336D20-A79D-2E98-02E4-9BC37B1FAB8C}"/>
+                <a16:creationId xmlns:a16="http://schemas.microsoft.com/office/drawing/2014/main" id="{2AA20CAC-E1C2-FC8F-DF21-A4498BCC04FC}"/>
               </a:ext>
             </a:extLst>
           </p:cNvPr>
@@ -5493,7 +5490,7 @@
           <p:cNvPr id="4" name="テキスト ボックス 3">
             <a:extLst>
               <a:ext uri="{FF2B5EF4-FFF2-40B4-BE49-F238E27FC236}">
-                <a16:creationId xmlns:a16="http://schemas.microsoft.com/office/drawing/2014/main" id="{73AB5F02-D4AF-D2BC-54A0-9C1FA12DB4AE}"/>
+                <a16:creationId xmlns:a16="http://schemas.microsoft.com/office/drawing/2014/main" id="{7790CE64-B850-ACA1-9FC8-410ADE6B889B}"/>
               </a:ext>
             </a:extLst>
           </p:cNvPr>
@@ -5558,7 +5555,7 @@
           <p:cNvPr id="5" name="テキスト ボックス 4">
             <a:extLst>
               <a:ext uri="{FF2B5EF4-FFF2-40B4-BE49-F238E27FC236}">
-                <a16:creationId xmlns:a16="http://schemas.microsoft.com/office/drawing/2014/main" id="{81A507E6-22BA-B907-E8AE-59546FFAC9B2}"/>
+                <a16:creationId xmlns:a16="http://schemas.microsoft.com/office/drawing/2014/main" id="{FA240787-63BC-6293-241E-FF44D1403AB3}"/>
               </a:ext>
             </a:extLst>
           </p:cNvPr>
@@ -5605,7 +5602,7 @@
             <a:hlinkClick r:id="" action="ppaction://media"/>
             <a:extLst>
               <a:ext uri="{FF2B5EF4-FFF2-40B4-BE49-F238E27FC236}">
-                <a16:creationId xmlns:a16="http://schemas.microsoft.com/office/drawing/2014/main" id="{3C1BF79E-4084-7D34-C6F2-CF0B643D2DB3}"/>
+                <a16:creationId xmlns:a16="http://schemas.microsoft.com/office/drawing/2014/main" id="{07D392DC-ECDB-E9F6-9644-97CD94587313}"/>
               </a:ext>
             </a:extLst>
           </p:cNvPr>
@@ -5640,7 +5637,7 @@
     </p:spTree>
     <p:extLst>
       <p:ext uri="{BB962C8B-B14F-4D97-AF65-F5344CB8AC3E}">
-        <p14:creationId xmlns:p14="http://schemas.microsoft.com/office/powerpoint/2010/main" val="3297510257"/>
+        <p14:creationId xmlns:p14="http://schemas.microsoft.com/office/powerpoint/2010/main" val="1250015118"/>
       </p:ext>
     </p:extLst>
   </p:cSld>
